--- a/docs/Prescriber_Knowledge_Platform_5pg_v2.pptx
+++ b/docs/Prescriber_Knowledge_Platform_5pg_v2.pptx
@@ -1100,7 +1100,7 @@
                 <a:ea typeface="Calibri" pitchFamily="34" charset="-122"/>
                 <a:cs typeface="Calibri" pitchFamily="34" charset="-120"/>
               </a:rPr>
-              <a:t>Prescriber Knowledge Platform</a:t>
+              <a:t>Knowledge Graph using Prescriber Data</a:t>
             </a:r>
             <a:endParaRPr lang="en-US" sz="5000" dirty="0"/>
           </a:p>

--- a/docs/Prescriber_Knowledge_Platform_5pg_v2.pptx
+++ b/docs/Prescriber_Knowledge_Platform_5pg_v2.pptx
@@ -7115,7 +7115,12 @@
           <a:p>
             <a:r>
               <a:rPr lang="en-US" altLang="en-US" sz="1050" dirty="0">
-                <a:latin typeface="Arial" panose="020B0604020202020204" pitchFamily="34" charset="0"/>
+                <a:solidFill>
+                  <a:srgbClr val="B8D4D4"/>
+                </a:solidFill>
+                <a:latin typeface="Calibri" pitchFamily="34" charset="0"/>
+                <a:ea typeface="Calibri" pitchFamily="34" charset="-122"/>
+                <a:cs typeface="Calibri" pitchFamily="34" charset="-120"/>
               </a:rPr>
               <a:t>Agents can flag providers, build watchlists, and leave notes — every action is logged and safe to repeat.</a:t>
             </a:r>

--- a/docs/Prescriber_Knowledge_Platform_5pg_v2.pptx
+++ b/docs/Prescriber_Knowledge_Platform_5pg_v2.pptx
@@ -10298,7 +10298,7 @@
         <p:spPr>
           <a:xfrm>
             <a:off x="7518640" y="2540000"/>
-            <a:ext cx="3934560" cy="260000"/>
+            <a:ext cx="3934560" cy="184666"/>
           </a:xfrm>
           <a:prstGeom prst="rect">
             <a:avLst/>
@@ -10313,13 +10313,13 @@
           <a:p>
             <a:pPr algn="l"/>
             <a:r>
-              <a:rPr sz="1200" b="1" i="0">
+              <a:rPr sz="1200" b="1" i="0" dirty="0">
                 <a:solidFill>
                   <a:srgbClr val="FFFFFF"/>
                 </a:solidFill>
                 <a:latin typeface="Calibri"/>
               </a:rPr>
-              <a:t>Semantic layer (YAML)</a:t>
+              <a:t>Semantic layer </a:t>
             </a:r>
           </a:p>
         </p:txBody>
@@ -10333,7 +10333,7 @@
         <p:spPr>
           <a:xfrm>
             <a:off x="7518640" y="2790000"/>
-            <a:ext cx="3934560" cy="180000"/>
+            <a:ext cx="3934560" cy="153888"/>
           </a:xfrm>
           <a:prstGeom prst="rect">
             <a:avLst/>
@@ -10348,14 +10348,20 @@
           <a:p>
             <a:pPr algn="l"/>
             <a:r>
-              <a:rPr sz="1000" b="0" i="0">
+              <a:rPr lang="en-US" sz="1000" dirty="0">
                 <a:solidFill>
                   <a:srgbClr val="B8D4D4"/>
                 </a:solidFill>
                 <a:latin typeface="Calibri"/>
               </a:rPr>
-              <a:t>13 metrics × 7 dimensions · 114k entities · 2.68M relations</a:t>
-            </a:r>
+              <a:t>graph projections  and relationships</a:t>
+            </a:r>
+            <a:endParaRPr sz="1000" b="0" i="0" dirty="0">
+              <a:solidFill>
+                <a:srgbClr val="B8D4D4"/>
+              </a:solidFill>
+              <a:latin typeface="Calibri"/>
+            </a:endParaRPr>
           </a:p>
         </p:txBody>
       </p:sp>

--- a/docs/Prescriber_Knowledge_Platform_5pg_v2.pptx
+++ b/docs/Prescriber_Knowledge_Platform_5pg_v2.pptx
@@ -8238,7 +8238,7 @@
         <p:spPr>
           <a:xfrm>
             <a:off x="828640" y="2760000"/>
-            <a:ext cx="10596160" cy="260000"/>
+            <a:ext cx="10596160" cy="153888"/>
           </a:xfrm>
           <a:prstGeom prst="rect">
             <a:avLst/>
@@ -8253,13 +8253,22 @@
           <a:p>
             <a:pPr algn="l"/>
             <a:r>
-              <a:rPr sz="1000" b="1">
+              <a:rPr lang="en-US" sz="1000" b="1" dirty="0">
                 <a:solidFill>
                   <a:srgbClr val="028090"/>
                 </a:solidFill>
                 <a:latin typeface="Calibri"/>
               </a:rPr>
-              <a:t>9 NAMED TOOLS — same surface for chatbot and external agents</a:t>
+              <a:t>SEMANTIC LAYER - </a:t>
+            </a:r>
+            <a:r>
+              <a:rPr sz="1000" b="1" dirty="0">
+                <a:solidFill>
+                  <a:srgbClr val="028090"/>
+                </a:solidFill>
+                <a:latin typeface="Calibri"/>
+              </a:rPr>
+              <a:t> same surface for chatbot and external agents</a:t>
             </a:r>
           </a:p>
         </p:txBody>
